--- a/materials/PMM-template-module/PMM-template-slides.pptx
+++ b/materials/PMM-template-module/PMM-template-slides.pptx
@@ -5518,7 +5518,7 @@
             </a:pPr>
             <a:r>
               <a:rPr/>
-              <a:t>22/02/2026</a:t>
+              <a:t>01/03/2026</a:t>
             </a:r>
           </a:p>
         </p:txBody>

--- a/materials/PMM-template-module/PMM-template-slides.pptx
+++ b/materials/PMM-template-module/PMM-template-slides.pptx
@@ -5518,7 +5518,7 @@
             </a:pPr>
             <a:r>
               <a:rPr/>
-              <a:t>01/03/2026</a:t>
+              <a:t>08/03/2026</a:t>
             </a:r>
           </a:p>
         </p:txBody>

--- a/materials/PMM-template-module/PMM-template-slides.pptx
+++ b/materials/PMM-template-module/PMM-template-slides.pptx
@@ -5518,7 +5518,7 @@
             </a:pPr>
             <a:r>
               <a:rPr/>
-              <a:t>08/03/2026</a:t>
+              <a:t>11/03/2026</a:t>
             </a:r>
           </a:p>
         </p:txBody>

--- a/materials/PMM-template-module/PMM-template-slides.pptx
+++ b/materials/PMM-template-module/PMM-template-slides.pptx
@@ -5518,7 +5518,7 @@
             </a:pPr>
             <a:r>
               <a:rPr/>
-              <a:t>11/03/2026</a:t>
+              <a:t>15/03/2026</a:t>
             </a:r>
           </a:p>
         </p:txBody>

--- a/materials/PMM-template-module/PMM-template-slides.pptx
+++ b/materials/PMM-template-module/PMM-template-slides.pptx
@@ -5489,8 +5489,6 @@
             <a:pPr lvl="0" indent="0" marL="0">
               <a:buNone/>
             </a:pPr>
-            <a:br/>
-            <a:br/>
             <a:r>
               <a:rPr/>
               <a:t>Author</a:t>
@@ -5518,7 +5516,7 @@
             </a:pPr>
             <a:r>
               <a:rPr/>
-              <a:t>15/03/2026</a:t>
+              <a:t>22/03/2026</a:t>
             </a:r>
           </a:p>
         </p:txBody>

--- a/materials/PMM-template-module/PMM-template-slides.pptx
+++ b/materials/PMM-template-module/PMM-template-slides.pptx
@@ -5516,7 +5516,7 @@
             </a:pPr>
             <a:r>
               <a:rPr/>
-              <a:t>22/03/2026</a:t>
+              <a:t>29/03/2026</a:t>
             </a:r>
           </a:p>
         </p:txBody>

--- a/materials/PMM-template-module/PMM-template-slides.pptx
+++ b/materials/PMM-template-module/PMM-template-slides.pptx
@@ -5516,7 +5516,7 @@
             </a:pPr>
             <a:r>
               <a:rPr/>
-              <a:t>29/03/2026</a:t>
+              <a:t>05/04/2026</a:t>
             </a:r>
           </a:p>
         </p:txBody>

--- a/materials/PMM-template-module/PMM-template-slides.pptx
+++ b/materials/PMM-template-module/PMM-template-slides.pptx
@@ -5516,7 +5516,7 @@
             </a:pPr>
             <a:r>
               <a:rPr/>
-              <a:t>05/04/2026</a:t>
+              <a:t>12/04/2026</a:t>
             </a:r>
           </a:p>
         </p:txBody>

--- a/materials/PMM-template-module/PMM-template-slides.pptx
+++ b/materials/PMM-template-module/PMM-template-slides.pptx
@@ -5516,7 +5516,7 @@
             </a:pPr>
             <a:r>
               <a:rPr/>
-              <a:t>12/04/2026</a:t>
+              <a:t>03/05/2026</a:t>
             </a:r>
           </a:p>
         </p:txBody>

--- a/materials/PMM-template-module/PMM-template-slides.pptx
+++ b/materials/PMM-template-module/PMM-template-slides.pptx
@@ -5516,7 +5516,7 @@
             </a:pPr>
             <a:r>
               <a:rPr/>
-              <a:t>03/05/2026</a:t>
+              <a:t>10/05/2026</a:t>
             </a:r>
           </a:p>
         </p:txBody>

--- a/materials/PMM-template-module/PMM-template-slides.pptx
+++ b/materials/PMM-template-module/PMM-template-slides.pptx
@@ -5516,7 +5516,7 @@
             </a:pPr>
             <a:r>
               <a:rPr/>
-              <a:t>10/05/2026</a:t>
+              <a:t>12/05/2026</a:t>
             </a:r>
           </a:p>
         </p:txBody>

--- a/materials/PMM-template-module/PMM-template-slides.pptx
+++ b/materials/PMM-template-module/PMM-template-slides.pptx
@@ -5516,7 +5516,7 @@
             </a:pPr>
             <a:r>
               <a:rPr/>
-              <a:t>12/05/2026</a:t>
+              <a:t>15/05/2026</a:t>
             </a:r>
           </a:p>
         </p:txBody>

--- a/materials/PMM-template-module/PMM-template-slides.pptx
+++ b/materials/PMM-template-module/PMM-template-slides.pptx
@@ -5516,7 +5516,7 @@
             </a:pPr>
             <a:r>
               <a:rPr/>
-              <a:t>15/05/2026</a:t>
+              <a:t>17/05/2026</a:t>
             </a:r>
           </a:p>
         </p:txBody>

--- a/materials/PMM-template-module/PMM-template-slides.pptx
+++ b/materials/PMM-template-module/PMM-template-slides.pptx
@@ -5516,7 +5516,7 @@
             </a:pPr>
             <a:r>
               <a:rPr/>
-              <a:t>17/05/2026</a:t>
+              <a:t>24/05/2026</a:t>
             </a:r>
           </a:p>
         </p:txBody>

--- a/materials/PMM-template-module/PMM-template-slides.pptx
+++ b/materials/PMM-template-module/PMM-template-slides.pptx
@@ -5516,7 +5516,7 @@
             </a:pPr>
             <a:r>
               <a:rPr/>
-              <a:t>24/05/2026</a:t>
+              <a:t>01/06/2026</a:t>
             </a:r>
           </a:p>
         </p:txBody>

--- a/materials/PMM-template-module/PMM-template-slides.pptx
+++ b/materials/PMM-template-module/PMM-template-slides.pptx
@@ -5516,7 +5516,7 @@
             </a:pPr>
             <a:r>
               <a:rPr/>
-              <a:t>01/06/2026</a:t>
+              <a:t>08/06/2026</a:t>
             </a:r>
           </a:p>
         </p:txBody>

--- a/materials/PMM-template-module/PMM-template-slides.pptx
+++ b/materials/PMM-template-module/PMM-template-slides.pptx
@@ -5516,7 +5516,7 @@
             </a:pPr>
             <a:r>
               <a:rPr/>
-              <a:t>08/06/2026</a:t>
+              <a:t>22/06/2026</a:t>
             </a:r>
           </a:p>
         </p:txBody>

--- a/materials/PMM-template-module/PMM-template-slides.pptx
+++ b/materials/PMM-template-module/PMM-template-slides.pptx
@@ -5516,7 +5516,7 @@
             </a:pPr>
             <a:r>
               <a:rPr/>
-              <a:t>22/06/2026</a:t>
+              <a:t>29/06/2026</a:t>
             </a:r>
           </a:p>
         </p:txBody>

--- a/materials/PMM-template-module/PMM-template-slides.pptx
+++ b/materials/PMM-template-module/PMM-template-slides.pptx
@@ -5516,7 +5516,7 @@
             </a:pPr>
             <a:r>
               <a:rPr/>
-              <a:t>29/06/2026</a:t>
+              <a:t>06/07/2026</a:t>
             </a:r>
           </a:p>
         </p:txBody>

--- a/materials/PMM-template-module/PMM-template-slides.pptx
+++ b/materials/PMM-template-module/PMM-template-slides.pptx
@@ -5516,7 +5516,7 @@
             </a:pPr>
             <a:r>
               <a:rPr/>
-              <a:t>06/07/2026</a:t>
+              <a:t>12/07/2026</a:t>
             </a:r>
           </a:p>
         </p:txBody>

--- a/materials/PMM-template-module/PMM-template-slides.pptx
+++ b/materials/PMM-template-module/PMM-template-slides.pptx
@@ -5516,7 +5516,7 @@
             </a:pPr>
             <a:r>
               <a:rPr/>
-              <a:t>12/07/2026</a:t>
+              <a:t>20/07/2026</a:t>
             </a:r>
           </a:p>
         </p:txBody>

--- a/materials/PMM-template-module/PMM-template-slides.pptx
+++ b/materials/PMM-template-module/PMM-template-slides.pptx
@@ -5516,7 +5516,7 @@
             </a:pPr>
             <a:r>
               <a:rPr/>
-              <a:t>20/07/2026</a:t>
+              <a:t>27/07/2026</a:t>
             </a:r>
           </a:p>
         </p:txBody>

--- a/materials/PMM-template-module/PMM-template-slides.pptx
+++ b/materials/PMM-template-module/PMM-template-slides.pptx
@@ -5516,7 +5516,7 @@
             </a:pPr>
             <a:r>
               <a:rPr/>
-              <a:t>27/07/2026</a:t>
+              <a:t>04/08/2026</a:t>
             </a:r>
           </a:p>
         </p:txBody>

--- a/materials/PMM-template-module/PMM-template-slides.pptx
+++ b/materials/PMM-template-module/PMM-template-slides.pptx
@@ -5516,7 +5516,7 @@
             </a:pPr>
             <a:r>
               <a:rPr/>
-              <a:t>04/08/2026</a:t>
+              <a:t>09/08/2026</a:t>
             </a:r>
           </a:p>
         </p:txBody>

--- a/materials/PMM-template-module/PMM-template-slides.pptx
+++ b/materials/PMM-template-module/PMM-template-slides.pptx
@@ -5516,7 +5516,7 @@
             </a:pPr>
             <a:r>
               <a:rPr/>
-              <a:t>09/08/2026</a:t>
+              <a:t>13/08/2026</a:t>
             </a:r>
           </a:p>
         </p:txBody>

--- a/materials/PMM-template-module/PMM-template-slides.pptx
+++ b/materials/PMM-template-module/PMM-template-slides.pptx
@@ -5516,7 +5516,7 @@
             </a:pPr>
             <a:r>
               <a:rPr/>
-              <a:t>13/08/2026</a:t>
+              <a:t>14/08/2026</a:t>
             </a:r>
           </a:p>
         </p:txBody>

--- a/materials/PMM-template-module/PMM-template-slides.pptx
+++ b/materials/PMM-template-module/PMM-template-slides.pptx
@@ -5516,7 +5516,7 @@
             </a:pPr>
             <a:r>
               <a:rPr/>
-              <a:t>14/08/2026</a:t>
+              <a:t>16/08/2026</a:t>
             </a:r>
           </a:p>
         </p:txBody>

--- a/materials/PMM-template-module/PMM-template-slides.pptx
+++ b/materials/PMM-template-module/PMM-template-slides.pptx
@@ -5516,7 +5516,7 @@
             </a:pPr>
             <a:r>
               <a:rPr/>
-              <a:t>16/08/2026</a:t>
+              <a:t>19/08/2026</a:t>
             </a:r>
           </a:p>
         </p:txBody>

--- a/materials/PMM-template-module/PMM-template-slides.pptx
+++ b/materials/PMM-template-module/PMM-template-slides.pptx
@@ -5516,7 +5516,7 @@
             </a:pPr>
             <a:r>
               <a:rPr/>
-              <a:t>19/08/2026</a:t>
+              <a:t>20/08/2026</a:t>
             </a:r>
           </a:p>
         </p:txBody>
